--- a/morning-registration-activities/register-reply/downloads/Register_Reply.pptx
+++ b/morning-registration-activities/register-reply/downloads/Register_Reply.pptx
@@ -6486,7 +6486,7 @@
                 </a:solidFill>
                 <a:latin typeface="Karla"/>
               </a:rPr>
-              <a:t>Needs: nothing to print. Five more questions are in the resource pack.</a:t>
+              <a:t>Needs: nothing to print.</a:t>
             </a:r>
           </a:p>
         </p:txBody>

--- a/morning-registration-activities/register-reply/downloads/Register_Reply.pptx
+++ b/morning-registration-activities/register-reply/downloads/Register_Reply.pptx
@@ -3147,7 +3147,7 @@
                 <a:solidFill>
                   <a:srgbClr val="8E6398"/>
                 </a:solidFill>
-                <a:latin typeface="Karla"/>
+                <a:latin typeface="Calibri"/>
               </a:rPr>
               <a:t>MORNING REGISTRATION ACTIVITIES</a:t>
             </a:r>
@@ -3179,11 +3179,11 @@
           <a:p>
             <a:pPr algn="ctr"/>
             <a:r>
-              <a:rPr sz="4000" b="1">
+              <a:rPr sz="4000" b="0">
                 <a:solidFill>
                   <a:srgbClr val="82558B"/>
                 </a:solidFill>
-                <a:latin typeface="Libre Caslon Display"/>
+                <a:latin typeface="Georgia"/>
               </a:rPr>
               <a:t>The Register Reply</a:t>
             </a:r>
@@ -3265,7 +3265,7 @@
                 <a:solidFill>
                   <a:srgbClr val="FFFDF7"/>
                 </a:solidFill>
-                <a:latin typeface="Karla"/>
+                <a:latin typeface="Calibri"/>
               </a:rPr>
               <a:t>VOLUME ONE</a:t>
             </a:r>
@@ -3301,7 +3301,7 @@
                 <a:solidFill>
                   <a:srgbClr val="6F4A78"/>
                 </a:solidFill>
-                <a:latin typeface="Karla"/>
+                <a:latin typeface="Calibri"/>
               </a:rPr>
               <a:t>When your name is called, answer the question on the board instead of saying “here”.</a:t>
             </a:r>
@@ -3458,7 +3458,7 @@
                 <a:solidFill>
                   <a:srgbClr val="FFFDF7"/>
                 </a:solidFill>
-                <a:latin typeface="Karla"/>
+                <a:latin typeface="Calibri"/>
               </a:rPr>
               <a:t>1</a:t>
             </a:r>
@@ -3494,7 +3494,7 @@
                 <a:solidFill>
                   <a:srgbClr val="82558B"/>
                 </a:solidFill>
-                <a:latin typeface="Karla"/>
+                <a:latin typeface="Calibri"/>
               </a:rPr>
               <a:t>A question goes up</a:t>
             </a:r>
@@ -3534,7 +3534,7 @@
                 <a:solidFill>
                   <a:srgbClr val="6F4A78"/>
                 </a:solidFill>
-                <a:latin typeface="Karla"/>
+                <a:latin typeface="Calibri"/>
               </a:rPr>
               <a:t>One question on the board before the register starts.</a:t>
             </a:r>
@@ -3691,7 +3691,7 @@
                 <a:solidFill>
                   <a:srgbClr val="FFFDF7"/>
                 </a:solidFill>
-                <a:latin typeface="Karla"/>
+                <a:latin typeface="Calibri"/>
               </a:rPr>
               <a:t>2</a:t>
             </a:r>
@@ -3727,7 +3727,7 @@
                 <a:solidFill>
                   <a:srgbClr val="82558B"/>
                 </a:solidFill>
-                <a:latin typeface="Karla"/>
+                <a:latin typeface="Calibri"/>
               </a:rPr>
               <a:t>The register runs as usual</a:t>
             </a:r>
@@ -3767,7 +3767,7 @@
                 <a:solidFill>
                   <a:srgbClr val="6F4A78"/>
                 </a:solidFill>
-                <a:latin typeface="Karla"/>
+                <a:latin typeface="Calibri"/>
               </a:rPr>
               <a:t>Same order, same pace, nothing else changes.</a:t>
             </a:r>
@@ -3924,7 +3924,7 @@
                 <a:solidFill>
                   <a:srgbClr val="FFFDF7"/>
                 </a:solidFill>
-                <a:latin typeface="Karla"/>
+                <a:latin typeface="Calibri"/>
               </a:rPr>
               <a:t>3</a:t>
             </a:r>
@@ -3960,7 +3960,7 @@
                 <a:solidFill>
                   <a:srgbClr val="82558B"/>
                 </a:solidFill>
-                <a:latin typeface="Karla"/>
+                <a:latin typeface="Calibri"/>
               </a:rPr>
               <a:t>You answer the question</a:t>
             </a:r>
@@ -4000,7 +4000,7 @@
                 <a:solidFill>
                   <a:srgbClr val="6F4A78"/>
                 </a:solidFill>
-                <a:latin typeface="Karla"/>
+                <a:latin typeface="Calibri"/>
               </a:rPr>
               <a:t>Say your answer instead of “here”. A word or two is plenty.</a:t>
             </a:r>
@@ -4082,7 +4082,7 @@
                 <a:solidFill>
                   <a:srgbClr val="FFFDF7"/>
                 </a:solidFill>
-                <a:latin typeface="Libre Caslon Display"/>
+                <a:latin typeface="Georgia"/>
               </a:rPr>
               <a:t>“One word for how today feels so far.”</a:t>
             </a:r>
@@ -4118,7 +4118,7 @@
                 <a:solidFill>
                   <a:srgbClr val="DCC9E0"/>
                 </a:solidFill>
-                <a:latin typeface="Karla"/>
+                <a:latin typeface="Calibri"/>
               </a:rPr>
               <a:t>The first of five questions in these slides</a:t>
             </a:r>
@@ -4154,7 +4154,7 @@
                 <a:solidFill>
                   <a:srgbClr val="A98CB0"/>
                 </a:solidFill>
-                <a:latin typeface="Karla"/>
+                <a:latin typeface="Calibri"/>
               </a:rPr>
               <a:t>Needs: nothing to print. The five questions are already here, one to a slide.</a:t>
             </a:r>
@@ -4214,7 +4214,7 @@
                 <a:solidFill>
                   <a:srgbClr val="A98CB0"/>
                 </a:solidFill>
-                <a:latin typeface="Libre Caslon Display"/>
+                <a:latin typeface="Georgia"/>
               </a:rPr>
               <a:t>The Pastoral Guide</a:t>
             </a:r>
@@ -4292,7 +4292,7 @@
                 <a:solidFill>
                   <a:srgbClr val="8E6398"/>
                 </a:solidFill>
-                <a:latin typeface="Karla"/>
+                <a:latin typeface="Calibri"/>
               </a:rPr>
               <a:t>THE REGISTER REPLY  ·  VOLUME ONE  ·  QUESTION 1 OF 5</a:t>
             </a:r>
@@ -4381,11 +4381,11 @@
               </a:lnSpc>
             </a:pPr>
             <a:r>
-              <a:rPr sz="3400" b="1">
+              <a:rPr sz="3400" b="0">
                 <a:solidFill>
                   <a:srgbClr val="82558B"/>
                 </a:solidFill>
-                <a:latin typeface="Libre Caslon Display"/>
+                <a:latin typeface="Georgia"/>
               </a:rPr>
               <a:t>One word for how today feels so far.</a:t>
             </a:r>
@@ -4421,7 +4421,7 @@
                 <a:solidFill>
                   <a:srgbClr val="6F4A78"/>
                 </a:solidFill>
-                <a:latin typeface="Karla"/>
+                <a:latin typeface="Calibri"/>
               </a:rPr>
               <a:t>One word or a short phrase is plenty. “Here” is always fine.</a:t>
             </a:r>
@@ -4481,7 +4481,7 @@
                 <a:solidFill>
                   <a:srgbClr val="A98CB0"/>
                 </a:solidFill>
-                <a:latin typeface="Libre Caslon Display"/>
+                <a:latin typeface="Georgia"/>
               </a:rPr>
               <a:t>The Pastoral Guide</a:t>
             </a:r>
@@ -4559,7 +4559,7 @@
                 <a:solidFill>
                   <a:srgbClr val="8E6398"/>
                 </a:solidFill>
-                <a:latin typeface="Karla"/>
+                <a:latin typeface="Calibri"/>
               </a:rPr>
               <a:t>THE REGISTER REPLY  ·  VOLUME ONE  ·  QUESTION 2 OF 5</a:t>
             </a:r>
@@ -4648,11 +4648,11 @@
               </a:lnSpc>
             </a:pPr>
             <a:r>
-              <a:rPr sz="3400" b="1">
+              <a:rPr sz="3400" b="0">
                 <a:solidFill>
                   <a:srgbClr val="82558B"/>
                 </a:solidFill>
-                <a:latin typeface="Libre Caslon Display"/>
+                <a:latin typeface="Georgia"/>
               </a:rPr>
               <a:t>What is one thing you are looking forward to today?</a:t>
             </a:r>
@@ -4688,7 +4688,7 @@
                 <a:solidFill>
                   <a:srgbClr val="6F4A78"/>
                 </a:solidFill>
-                <a:latin typeface="Karla"/>
+                <a:latin typeface="Calibri"/>
               </a:rPr>
               <a:t>One word or a short phrase is plenty. “Here” is always fine.</a:t>
             </a:r>
@@ -4748,7 +4748,7 @@
                 <a:solidFill>
                   <a:srgbClr val="A98CB0"/>
                 </a:solidFill>
-                <a:latin typeface="Libre Caslon Display"/>
+                <a:latin typeface="Georgia"/>
               </a:rPr>
               <a:t>The Pastoral Guide</a:t>
             </a:r>
@@ -4826,7 +4826,7 @@
                 <a:solidFill>
                   <a:srgbClr val="8E6398"/>
                 </a:solidFill>
-                <a:latin typeface="Karla"/>
+                <a:latin typeface="Calibri"/>
               </a:rPr>
               <a:t>THE REGISTER REPLY  ·  VOLUME ONE  ·  QUESTION 3 OF 5</a:t>
             </a:r>
@@ -4915,11 +4915,11 @@
               </a:lnSpc>
             </a:pPr>
             <a:r>
-              <a:rPr sz="3400" b="1">
+              <a:rPr sz="3400" b="0">
                 <a:solidFill>
                   <a:srgbClr val="82558B"/>
                 </a:solidFill>
-                <a:latin typeface="Libre Caslon Display"/>
+                <a:latin typeface="Georgia"/>
               </a:rPr>
               <a:t>Name something you are good at.</a:t>
             </a:r>
@@ -4955,7 +4955,7 @@
                 <a:solidFill>
                   <a:srgbClr val="6F4A78"/>
                 </a:solidFill>
-                <a:latin typeface="Karla"/>
+                <a:latin typeface="Calibri"/>
               </a:rPr>
               <a:t>One word or a short phrase is plenty. “Here” is always fine.</a:t>
             </a:r>
@@ -5015,7 +5015,7 @@
                 <a:solidFill>
                   <a:srgbClr val="A98CB0"/>
                 </a:solidFill>
-                <a:latin typeface="Libre Caslon Display"/>
+                <a:latin typeface="Georgia"/>
               </a:rPr>
               <a:t>The Pastoral Guide</a:t>
             </a:r>
@@ -5093,7 +5093,7 @@
                 <a:solidFill>
                   <a:srgbClr val="8E6398"/>
                 </a:solidFill>
-                <a:latin typeface="Karla"/>
+                <a:latin typeface="Calibri"/>
               </a:rPr>
               <a:t>THE REGISTER REPLY  ·  VOLUME ONE  ·  QUESTION 4 OF 5</a:t>
             </a:r>
@@ -5182,11 +5182,11 @@
               </a:lnSpc>
             </a:pPr>
             <a:r>
-              <a:rPr sz="3400" b="1">
+              <a:rPr sz="3400" b="0">
                 <a:solidFill>
                   <a:srgbClr val="82558B"/>
                 </a:solidFill>
-                <a:latin typeface="Libre Caslon Display"/>
+                <a:latin typeface="Georgia"/>
               </a:rPr>
               <a:t>Say the name of someone who has helped you recently.</a:t>
             </a:r>
@@ -5222,7 +5222,7 @@
                 <a:solidFill>
                   <a:srgbClr val="6F4A78"/>
                 </a:solidFill>
-                <a:latin typeface="Karla"/>
+                <a:latin typeface="Calibri"/>
               </a:rPr>
               <a:t>One word or a short phrase is plenty. “Here” is always fine.</a:t>
             </a:r>
@@ -5282,7 +5282,7 @@
                 <a:solidFill>
                   <a:srgbClr val="A98CB0"/>
                 </a:solidFill>
-                <a:latin typeface="Libre Caslon Display"/>
+                <a:latin typeface="Georgia"/>
               </a:rPr>
               <a:t>The Pastoral Guide</a:t>
             </a:r>
@@ -5360,7 +5360,7 @@
                 <a:solidFill>
                   <a:srgbClr val="8E6398"/>
                 </a:solidFill>
-                <a:latin typeface="Karla"/>
+                <a:latin typeface="Calibri"/>
               </a:rPr>
               <a:t>THE REGISTER REPLY  ·  VOLUME ONE  ·  QUESTION 5 OF 5</a:t>
             </a:r>
@@ -5449,11 +5449,11 @@
               </a:lnSpc>
             </a:pPr>
             <a:r>
-              <a:rPr sz="3400" b="1">
+              <a:rPr sz="3400" b="0">
                 <a:solidFill>
                   <a:srgbClr val="82558B"/>
                 </a:solidFill>
-                <a:latin typeface="Libre Caslon Display"/>
+                <a:latin typeface="Georgia"/>
               </a:rPr>
               <a:t>What would make today a good day?</a:t>
             </a:r>
@@ -5489,7 +5489,7 @@
                 <a:solidFill>
                   <a:srgbClr val="6F4A78"/>
                 </a:solidFill>
-                <a:latin typeface="Karla"/>
+                <a:latin typeface="Calibri"/>
               </a:rPr>
               <a:t>One word or a short phrase is plenty. “Here” is always fine.</a:t>
             </a:r>
@@ -5549,7 +5549,7 @@
                 <a:solidFill>
                   <a:srgbClr val="A98CB0"/>
                 </a:solidFill>
-                <a:latin typeface="Libre Caslon Display"/>
+                <a:latin typeface="Georgia"/>
               </a:rPr>
               <a:t>The Pastoral Guide</a:t>
             </a:r>
@@ -5627,7 +5627,7 @@
                 <a:solidFill>
                   <a:srgbClr val="8E6398"/>
                 </a:solidFill>
-                <a:latin typeface="Karla"/>
+                <a:latin typeface="Calibri"/>
               </a:rPr>
               <a:t>THE REGISTER REPLY</a:t>
             </a:r>
@@ -5659,11 +5659,11 @@
           <a:p>
             <a:pPr algn="ctr"/>
             <a:r>
-              <a:rPr sz="4000" b="1">
+              <a:rPr sz="4000" b="0">
                 <a:solidFill>
                   <a:srgbClr val="82558B"/>
                 </a:solidFill>
-                <a:latin typeface="Libre Caslon Display"/>
+                <a:latin typeface="Georgia"/>
               </a:rPr>
               <a:t>Your question next</a:t>
             </a:r>
@@ -5703,7 +5703,7 @@
                 <a:solidFill>
                   <a:srgbClr val="6F4A78"/>
                 </a:solidFill>
-                <a:latin typeface="Karla"/>
+                <a:latin typeface="Calibri"/>
               </a:rPr>
               <a:t>Five questions in these slides, and five more in the resource pack.</a:t>
             </a:r>
@@ -5713,7 +5713,7 @@
                 <a:solidFill>
                   <a:srgbClr val="6F4A78"/>
                 </a:solidFill>
-                <a:latin typeface="Karla"/>
+                <a:latin typeface="Calibri"/>
               </a:rPr>
               <a:t>After those, they come from you.</a:t>
             </a:r>
@@ -5870,7 +5870,7 @@
                 <a:solidFill>
                   <a:srgbClr val="FFFDF7"/>
                 </a:solidFill>
-                <a:latin typeface="Karla"/>
+                <a:latin typeface="Calibri"/>
               </a:rPr>
               <a:t>1</a:t>
             </a:r>
@@ -5906,7 +5906,7 @@
                 <a:solidFill>
                   <a:srgbClr val="82558B"/>
                 </a:solidFill>
-                <a:latin typeface="Karla"/>
+                <a:latin typeface="Calibri"/>
               </a:rPr>
               <a:t>Think of a question</a:t>
             </a:r>
@@ -5946,7 +5946,7 @@
                 <a:solidFill>
                   <a:srgbClr val="6F4A78"/>
                 </a:solidFill>
-                <a:latin typeface="Karla"/>
+                <a:latin typeface="Calibri"/>
               </a:rPr>
               <a:t>Something you would like to hear thirty different answers to.</a:t>
             </a:r>
@@ -6103,7 +6103,7 @@
                 <a:solidFill>
                   <a:srgbClr val="FFFDF7"/>
                 </a:solidFill>
-                <a:latin typeface="Karla"/>
+                <a:latin typeface="Calibri"/>
               </a:rPr>
               <a:t>2</a:t>
             </a:r>
@@ -6139,7 +6139,7 @@
                 <a:solidFill>
                   <a:srgbClr val="82558B"/>
                 </a:solidFill>
-                <a:latin typeface="Karla"/>
+                <a:latin typeface="Calibri"/>
               </a:rPr>
               <a:t>Check it works for all</a:t>
             </a:r>
@@ -6179,7 +6179,7 @@
                 <a:solidFill>
                   <a:srgbClr val="6F4A78"/>
                 </a:solidFill>
-                <a:latin typeface="Karla"/>
+                <a:latin typeface="Calibri"/>
               </a:rPr>
               <a:t>It has to work for the quietest person in the room too.</a:t>
             </a:r>
@@ -6336,7 +6336,7 @@
                 <a:solidFill>
                   <a:srgbClr val="FFFDF7"/>
                 </a:solidFill>
-                <a:latin typeface="Karla"/>
+                <a:latin typeface="Calibri"/>
               </a:rPr>
               <a:t>3</a:t>
             </a:r>
@@ -6372,7 +6372,7 @@
                 <a:solidFill>
                   <a:srgbClr val="82558B"/>
                 </a:solidFill>
-                <a:latin typeface="Karla"/>
+                <a:latin typeface="Calibri"/>
               </a:rPr>
               <a:t>Bring it to your tutor</a:t>
             </a:r>
@@ -6412,7 +6412,7 @@
                 <a:solidFill>
                   <a:srgbClr val="6F4A78"/>
                 </a:solidFill>
-                <a:latin typeface="Karla"/>
+                <a:latin typeface="Calibri"/>
               </a:rPr>
               <a:t>One of them goes up on the board the next morning.</a:t>
             </a:r>
@@ -6448,7 +6448,7 @@
                 <a:solidFill>
                   <a:srgbClr val="82558B"/>
                 </a:solidFill>
-                <a:latin typeface="Libre Caslon Display"/>
+                <a:latin typeface="Georgia"/>
               </a:rPr>
               <a:t>A question you would answer honestly yourself is usually a good one.</a:t>
             </a:r>
@@ -6484,7 +6484,7 @@
                 <a:solidFill>
                   <a:srgbClr val="A98CB0"/>
                 </a:solidFill>
-                <a:latin typeface="Karla"/>
+                <a:latin typeface="Calibri"/>
               </a:rPr>
               <a:t>Needs: nothing to print.</a:t>
             </a:r>
@@ -6544,7 +6544,7 @@
                 <a:solidFill>
                   <a:srgbClr val="A98CB0"/>
                 </a:solidFill>
-                <a:latin typeface="Libre Caslon Display"/>
+                <a:latin typeface="Georgia"/>
               </a:rPr>
               <a:t>The Pastoral Guide</a:t>
             </a:r>
